--- a/26fall/1860/Lecture/Week1.3/Lecture 1.3.2.pptx
+++ b/26fall/1860/Lecture/Week1.3/Lecture 1.3.2.pptx
@@ -168,220 +168,6 @@
 
 <file path=ppt/changesInfos/changesInfo1.xml><?xml version="1.0" encoding="utf-8"?>
 <pc:chgInfo xmlns:a="http://schemas.openxmlformats.org/drawingml/2006/main" xmlns:r="http://schemas.openxmlformats.org/officeDocument/2006/relationships" xmlns:ac="http://schemas.microsoft.com/office/drawing/2013/main/command" xmlns:pc="http://schemas.microsoft.com/office/powerpoint/2013/main/command">
-  <pc:docChgLst>
-    <pc:chgData name="James Dyer" userId="c78f284b-7e37-4191-b5a6-8e3806eb7037" providerId="ADAL" clId="{D5252268-0D0F-4541-8ACA-BDEDFCAB75FD}"/>
-    <pc:docChg chg="delSld">
-      <pc:chgData name="James Dyer" userId="c78f284b-7e37-4191-b5a6-8e3806eb7037" providerId="ADAL" clId="{D5252268-0D0F-4541-8ACA-BDEDFCAB75FD}" dt="2025-09-01T13:32:13.907" v="3" actId="47"/>
-      <pc:docMkLst>
-        <pc:docMk/>
-      </pc:docMkLst>
-      <pc:sldChg chg="del">
-        <pc:chgData name="James Dyer" userId="c78f284b-7e37-4191-b5a6-8e3806eb7037" providerId="ADAL" clId="{D5252268-0D0F-4541-8ACA-BDEDFCAB75FD}" dt="2025-09-01T13:31:40.322" v="0" actId="47"/>
-        <pc:sldMkLst>
-          <pc:docMk/>
-          <pc:sldMk cId="2245304506" sldId="274"/>
-        </pc:sldMkLst>
-      </pc:sldChg>
-      <pc:sldChg chg="del">
-        <pc:chgData name="James Dyer" userId="c78f284b-7e37-4191-b5a6-8e3806eb7037" providerId="ADAL" clId="{D5252268-0D0F-4541-8ACA-BDEDFCAB75FD}" dt="2025-09-01T13:31:52.042" v="1" actId="47"/>
-        <pc:sldMkLst>
-          <pc:docMk/>
-          <pc:sldMk cId="3741139823" sldId="286"/>
-        </pc:sldMkLst>
-      </pc:sldChg>
-      <pc:sldChg chg="del">
-        <pc:chgData name="James Dyer" userId="c78f284b-7e37-4191-b5a6-8e3806eb7037" providerId="ADAL" clId="{D5252268-0D0F-4541-8ACA-BDEDFCAB75FD}" dt="2025-09-01T13:31:52.042" v="1" actId="47"/>
-        <pc:sldMkLst>
-          <pc:docMk/>
-          <pc:sldMk cId="2559613080" sldId="287"/>
-        </pc:sldMkLst>
-      </pc:sldChg>
-      <pc:sldChg chg="del">
-        <pc:chgData name="James Dyer" userId="c78f284b-7e37-4191-b5a6-8e3806eb7037" providerId="ADAL" clId="{D5252268-0D0F-4541-8ACA-BDEDFCAB75FD}" dt="2025-09-01T13:32:02.134" v="2" actId="47"/>
-        <pc:sldMkLst>
-          <pc:docMk/>
-          <pc:sldMk cId="754725535" sldId="293"/>
-        </pc:sldMkLst>
-      </pc:sldChg>
-      <pc:sldChg chg="del">
-        <pc:chgData name="James Dyer" userId="c78f284b-7e37-4191-b5a6-8e3806eb7037" providerId="ADAL" clId="{D5252268-0D0F-4541-8ACA-BDEDFCAB75FD}" dt="2025-09-01T13:32:02.134" v="2" actId="47"/>
-        <pc:sldMkLst>
-          <pc:docMk/>
-          <pc:sldMk cId="4267135962" sldId="294"/>
-        </pc:sldMkLst>
-      </pc:sldChg>
-      <pc:sldChg chg="del">
-        <pc:chgData name="James Dyer" userId="c78f284b-7e37-4191-b5a6-8e3806eb7037" providerId="ADAL" clId="{D5252268-0D0F-4541-8ACA-BDEDFCAB75FD}" dt="2025-09-01T13:32:13.907" v="3" actId="47"/>
-        <pc:sldMkLst>
-          <pc:docMk/>
-          <pc:sldMk cId="4058427115" sldId="298"/>
-        </pc:sldMkLst>
-      </pc:sldChg>
-      <pc:sldChg chg="del">
-        <pc:chgData name="James Dyer" userId="c78f284b-7e37-4191-b5a6-8e3806eb7037" providerId="ADAL" clId="{D5252268-0D0F-4541-8ACA-BDEDFCAB75FD}" dt="2025-09-01T13:32:13.907" v="3" actId="47"/>
-        <pc:sldMkLst>
-          <pc:docMk/>
-          <pc:sldMk cId="2798715774" sldId="352"/>
-        </pc:sldMkLst>
-      </pc:sldChg>
-    </pc:docChg>
-  </pc:docChgLst>
-  <pc:docChgLst>
-    <pc:chgData name="James Dyer" userId="c78f284b-7e37-4191-b5a6-8e3806eb7037" providerId="ADAL" clId="{D985001E-EA5F-4E37-AD7D-B1A64860480F}"/>
-    <pc:docChg chg="addSld delSld modSld">
-      <pc:chgData name="James Dyer" userId="c78f284b-7e37-4191-b5a6-8e3806eb7037" providerId="ADAL" clId="{D985001E-EA5F-4E37-AD7D-B1A64860480F}" dt="2025-03-11T14:54:31.348" v="342" actId="20577"/>
-      <pc:docMkLst>
-        <pc:docMk/>
-      </pc:docMkLst>
-      <pc:sldChg chg="modSp">
-        <pc:chgData name="James Dyer" userId="c78f284b-7e37-4191-b5a6-8e3806eb7037" providerId="ADAL" clId="{D985001E-EA5F-4E37-AD7D-B1A64860480F}" dt="2025-03-11T14:49:24.868" v="33" actId="20577"/>
-        <pc:sldMkLst>
-          <pc:docMk/>
-          <pc:sldMk cId="5741423" sldId="264"/>
-        </pc:sldMkLst>
-      </pc:sldChg>
-      <pc:sldChg chg="modSp">
-        <pc:chgData name="James Dyer" userId="c78f284b-7e37-4191-b5a6-8e3806eb7037" providerId="ADAL" clId="{D985001E-EA5F-4E37-AD7D-B1A64860480F}" dt="2025-03-11T14:49:16.660" v="28" actId="20577"/>
-        <pc:sldMkLst>
-          <pc:docMk/>
-          <pc:sldMk cId="1256353005" sldId="268"/>
-        </pc:sldMkLst>
-      </pc:sldChg>
-      <pc:sldChg chg="modSp">
-        <pc:chgData name="James Dyer" userId="c78f284b-7e37-4191-b5a6-8e3806eb7037" providerId="ADAL" clId="{D985001E-EA5F-4E37-AD7D-B1A64860480F}" dt="2025-03-11T14:49:07.660" v="15" actId="20577"/>
-        <pc:sldMkLst>
-          <pc:docMk/>
-          <pc:sldMk cId="3674065384" sldId="269"/>
-        </pc:sldMkLst>
-      </pc:sldChg>
-      <pc:sldChg chg="modSp">
-        <pc:chgData name="James Dyer" userId="c78f284b-7e37-4191-b5a6-8e3806eb7037" providerId="ADAL" clId="{D985001E-EA5F-4E37-AD7D-B1A64860480F}" dt="2025-03-11T14:48:56.117" v="4" actId="20577"/>
-        <pc:sldMkLst>
-          <pc:docMk/>
-          <pc:sldMk cId="625189356" sldId="271"/>
-        </pc:sldMkLst>
-      </pc:sldChg>
-      <pc:sldChg chg="del">
-        <pc:chgData name="James Dyer" userId="c78f284b-7e37-4191-b5a6-8e3806eb7037" providerId="ADAL" clId="{D985001E-EA5F-4E37-AD7D-B1A64860480F}" dt="2025-03-11T14:51:54.235" v="171" actId="2696"/>
-        <pc:sldMkLst>
-          <pc:docMk/>
-          <pc:sldMk cId="880848308" sldId="281"/>
-        </pc:sldMkLst>
-      </pc:sldChg>
-      <pc:sldChg chg="del">
-        <pc:chgData name="James Dyer" userId="c78f284b-7e37-4191-b5a6-8e3806eb7037" providerId="ADAL" clId="{D985001E-EA5F-4E37-AD7D-B1A64860480F}" dt="2025-03-11T14:51:47.842" v="170" actId="2696"/>
-        <pc:sldMkLst>
-          <pc:docMk/>
-          <pc:sldMk cId="379466069" sldId="283"/>
-        </pc:sldMkLst>
-      </pc:sldChg>
-      <pc:sldChg chg="del">
-        <pc:chgData name="James Dyer" userId="c78f284b-7e37-4191-b5a6-8e3806eb7037" providerId="ADAL" clId="{D985001E-EA5F-4E37-AD7D-B1A64860480F}" dt="2025-03-11T14:52:13.531" v="172" actId="2696"/>
-        <pc:sldMkLst>
-          <pc:docMk/>
-          <pc:sldMk cId="139244500" sldId="289"/>
-        </pc:sldMkLst>
-      </pc:sldChg>
-      <pc:sldChg chg="modSp mod">
-        <pc:chgData name="James Dyer" userId="c78f284b-7e37-4191-b5a6-8e3806eb7037" providerId="ADAL" clId="{D985001E-EA5F-4E37-AD7D-B1A64860480F}" dt="2025-03-11T14:54:31.348" v="342" actId="20577"/>
-        <pc:sldMkLst>
-          <pc:docMk/>
-          <pc:sldMk cId="2837838066" sldId="308"/>
-        </pc:sldMkLst>
-      </pc:sldChg>
-      <pc:sldChg chg="modSp new mod">
-        <pc:chgData name="James Dyer" userId="c78f284b-7e37-4191-b5a6-8e3806eb7037" providerId="ADAL" clId="{D985001E-EA5F-4E37-AD7D-B1A64860480F}" dt="2025-03-11T14:50:17.415" v="86" actId="20577"/>
-        <pc:sldMkLst>
-          <pc:docMk/>
-          <pc:sldMk cId="1746381905" sldId="340"/>
-        </pc:sldMkLst>
-      </pc:sldChg>
-      <pc:sldChg chg="modSp new mod">
-        <pc:chgData name="James Dyer" userId="c78f284b-7e37-4191-b5a6-8e3806eb7037" providerId="ADAL" clId="{D985001E-EA5F-4E37-AD7D-B1A64860480F}" dt="2025-03-11T14:50:59.838" v="168" actId="20577"/>
-        <pc:sldMkLst>
-          <pc:docMk/>
-          <pc:sldMk cId="3037604075" sldId="341"/>
-        </pc:sldMkLst>
-      </pc:sldChg>
-      <pc:sldChg chg="modSp new mod">
-        <pc:chgData name="James Dyer" userId="c78f284b-7e37-4191-b5a6-8e3806eb7037" providerId="ADAL" clId="{D985001E-EA5F-4E37-AD7D-B1A64860480F}" dt="2025-03-11T14:53:41.088" v="332" actId="20577"/>
-        <pc:sldMkLst>
-          <pc:docMk/>
-          <pc:sldMk cId="721780042" sldId="342"/>
-        </pc:sldMkLst>
-      </pc:sldChg>
-      <pc:sldChg chg="add del">
-        <pc:chgData name="James Dyer" userId="c78f284b-7e37-4191-b5a6-8e3806eb7037" providerId="ADAL" clId="{D985001E-EA5F-4E37-AD7D-B1A64860480F}" dt="2025-03-11T14:51:47.842" v="170" actId="2696"/>
-        <pc:sldMkLst>
-          <pc:docMk/>
-          <pc:sldMk cId="1288733903" sldId="342"/>
-        </pc:sldMkLst>
-      </pc:sldChg>
-    </pc:docChg>
-  </pc:docChgLst>
-  <pc:docChgLst>
-    <pc:chgData name="James Dyer" userId="c78f284b-7e37-4191-b5a6-8e3806eb7037" providerId="ADAL" clId="{86C6A08F-893D-4701-890E-01E4A18935FD}"/>
-    <pc:docChg chg="addSld modSld">
-      <pc:chgData name="James Dyer" userId="c78f284b-7e37-4191-b5a6-8e3806eb7037" providerId="ADAL" clId="{86C6A08F-893D-4701-890E-01E4A18935FD}" dt="2024-10-21T19:03:21.101" v="112"/>
-      <pc:docMkLst>
-        <pc:docMk/>
-      </pc:docMkLst>
-      <pc:sldChg chg="modSp">
-        <pc:chgData name="James Dyer" userId="c78f284b-7e37-4191-b5a6-8e3806eb7037" providerId="ADAL" clId="{86C6A08F-893D-4701-890E-01E4A18935FD}" dt="2024-10-21T19:03:21.101" v="112"/>
-        <pc:sldMkLst>
-          <pc:docMk/>
-          <pc:sldMk cId="3674065384" sldId="269"/>
-        </pc:sldMkLst>
-      </pc:sldChg>
-      <pc:sldChg chg="modSp add mod">
-        <pc:chgData name="James Dyer" userId="c78f284b-7e37-4191-b5a6-8e3806eb7037" providerId="ADAL" clId="{86C6A08F-893D-4701-890E-01E4A18935FD}" dt="2024-10-21T12:57:16.590" v="108" actId="20577"/>
-        <pc:sldMkLst>
-          <pc:docMk/>
-          <pc:sldMk cId="2458435575" sldId="339"/>
-        </pc:sldMkLst>
-      </pc:sldChg>
-    </pc:docChg>
-  </pc:docChgLst>
-  <pc:docChgLst>
-    <pc:chgData name="James Dyer" userId="c78f284b-7e37-4191-b5a6-8e3806eb7037" providerId="ADAL" clId="{165CD995-CA79-480E-BE60-894280E89E12}"/>
-    <pc:docChg chg="modSld">
-      <pc:chgData name="James Dyer" userId="c78f284b-7e37-4191-b5a6-8e3806eb7037" providerId="ADAL" clId="{165CD995-CA79-480E-BE60-894280E89E12}" dt="2024-12-09T14:58:05.899" v="62" actId="14734"/>
-      <pc:docMkLst>
-        <pc:docMk/>
-      </pc:docMkLst>
-      <pc:sldChg chg="modSp mod">
-        <pc:chgData name="James Dyer" userId="c78f284b-7e37-4191-b5a6-8e3806eb7037" providerId="ADAL" clId="{165CD995-CA79-480E-BE60-894280E89E12}" dt="2024-12-09T14:58:05.899" v="62" actId="14734"/>
-        <pc:sldMkLst>
-          <pc:docMk/>
-          <pc:sldMk cId="1834755248" sldId="275"/>
-        </pc:sldMkLst>
-      </pc:sldChg>
-    </pc:docChg>
-  </pc:docChgLst>
-  <pc:docChgLst>
-    <pc:chgData name="James Dyer" userId="c78f284b-7e37-4191-b5a6-8e3806eb7037" providerId="ADAL" clId="{2DE821A4-F2FB-46B5-9495-83D9A2E5DF87}"/>
-    <pc:docChg chg="modSld">
-      <pc:chgData name="James Dyer" userId="c78f284b-7e37-4191-b5a6-8e3806eb7037" providerId="ADAL" clId="{2DE821A4-F2FB-46B5-9495-83D9A2E5DF87}" dt="2025-10-16T12:21:34.803" v="7" actId="20577"/>
-      <pc:docMkLst>
-        <pc:docMk/>
-      </pc:docMkLst>
-      <pc:sldChg chg="modSp">
-        <pc:chgData name="James Dyer" userId="c78f284b-7e37-4191-b5a6-8e3806eb7037" providerId="ADAL" clId="{2DE821A4-F2FB-46B5-9495-83D9A2E5DF87}" dt="2025-10-16T12:21:34.803" v="7" actId="20577"/>
-        <pc:sldMkLst>
-          <pc:docMk/>
-          <pc:sldMk cId="3803454951" sldId="272"/>
-        </pc:sldMkLst>
-        <pc:spChg chg="mod">
-          <ac:chgData name="James Dyer" userId="c78f284b-7e37-4191-b5a6-8e3806eb7037" providerId="ADAL" clId="{2DE821A4-F2FB-46B5-9495-83D9A2E5DF87}" dt="2025-10-16T12:21:34.803" v="7" actId="20577"/>
-          <ac:spMkLst>
-            <pc:docMk/>
-            <pc:sldMk cId="3803454951" sldId="272"/>
-            <ac:spMk id="3" creationId="{E048A38D-B5AC-168B-4EC6-93C404289CF3}"/>
-          </ac:spMkLst>
-        </pc:spChg>
-      </pc:sldChg>
-    </pc:docChg>
-  </pc:docChgLst>
   <pc:docChgLst>
     <pc:chgData name="James Dyer" userId="c78f284b-7e37-4191-b5a6-8e3806eb7037" providerId="ADAL" clId="{724D9455-F736-4429-9F45-7D6A4683321B}"/>
     <pc:docChg chg="undo custSel addSld delSld modSld sldOrd">
@@ -784,6 +570,110 @@
     </pc:docChg>
   </pc:docChgLst>
   <pc:docChgLst>
+    <pc:chgData name="James Dyer" userId="c78f284b-7e37-4191-b5a6-8e3806eb7037" providerId="ADAL" clId="{9136AB9D-76A3-4571-A450-C56184ECEB32}"/>
+    <pc:docChg chg="modSld">
+      <pc:chgData name="James Dyer" userId="c78f284b-7e37-4191-b5a6-8e3806eb7037" providerId="ADAL" clId="{9136AB9D-76A3-4571-A450-C56184ECEB32}" dt="2025-04-11T11:12:50.545" v="57" actId="20577"/>
+      <pc:docMkLst>
+        <pc:docMk/>
+      </pc:docMkLst>
+      <pc:sldChg chg="modSp">
+        <pc:chgData name="James Dyer" userId="c78f284b-7e37-4191-b5a6-8e3806eb7037" providerId="ADAL" clId="{9136AB9D-76A3-4571-A450-C56184ECEB32}" dt="2025-04-11T11:10:35.387" v="41" actId="113"/>
+        <pc:sldMkLst>
+          <pc:docMk/>
+          <pc:sldMk cId="3674065384" sldId="269"/>
+        </pc:sldMkLst>
+      </pc:sldChg>
+      <pc:sldChg chg="modSp mod">
+        <pc:chgData name="James Dyer" userId="c78f284b-7e37-4191-b5a6-8e3806eb7037" providerId="ADAL" clId="{9136AB9D-76A3-4571-A450-C56184ECEB32}" dt="2025-04-11T11:12:50.545" v="57" actId="20577"/>
+        <pc:sldMkLst>
+          <pc:docMk/>
+          <pc:sldMk cId="1834755248" sldId="275"/>
+        </pc:sldMkLst>
+      </pc:sldChg>
+    </pc:docChg>
+  </pc:docChgLst>
+  <pc:docChgLst>
+    <pc:chgData name="James Dyer" userId="c78f284b-7e37-4191-b5a6-8e3806eb7037" providerId="ADAL" clId="{86C6A08F-893D-4701-890E-01E4A18935FD}"/>
+    <pc:docChg chg="addSld modSld">
+      <pc:chgData name="James Dyer" userId="c78f284b-7e37-4191-b5a6-8e3806eb7037" providerId="ADAL" clId="{86C6A08F-893D-4701-890E-01E4A18935FD}" dt="2024-10-21T19:03:21.101" v="112"/>
+      <pc:docMkLst>
+        <pc:docMk/>
+      </pc:docMkLst>
+      <pc:sldChg chg="modSp">
+        <pc:chgData name="James Dyer" userId="c78f284b-7e37-4191-b5a6-8e3806eb7037" providerId="ADAL" clId="{86C6A08F-893D-4701-890E-01E4A18935FD}" dt="2024-10-21T19:03:21.101" v="112"/>
+        <pc:sldMkLst>
+          <pc:docMk/>
+          <pc:sldMk cId="3674065384" sldId="269"/>
+        </pc:sldMkLst>
+      </pc:sldChg>
+      <pc:sldChg chg="modSp add mod">
+        <pc:chgData name="James Dyer" userId="c78f284b-7e37-4191-b5a6-8e3806eb7037" providerId="ADAL" clId="{86C6A08F-893D-4701-890E-01E4A18935FD}" dt="2024-10-21T12:57:16.590" v="108" actId="20577"/>
+        <pc:sldMkLst>
+          <pc:docMk/>
+          <pc:sldMk cId="2458435575" sldId="339"/>
+        </pc:sldMkLst>
+      </pc:sldChg>
+    </pc:docChg>
+  </pc:docChgLst>
+  <pc:docChgLst>
+    <pc:chgData name="James Dyer" userId="c78f284b-7e37-4191-b5a6-8e3806eb7037" providerId="ADAL" clId="{D5252268-0D0F-4541-8ACA-BDEDFCAB75FD}"/>
+    <pc:docChg chg="delSld">
+      <pc:chgData name="James Dyer" userId="c78f284b-7e37-4191-b5a6-8e3806eb7037" providerId="ADAL" clId="{D5252268-0D0F-4541-8ACA-BDEDFCAB75FD}" dt="2025-09-01T13:32:13.907" v="3" actId="47"/>
+      <pc:docMkLst>
+        <pc:docMk/>
+      </pc:docMkLst>
+      <pc:sldChg chg="del">
+        <pc:chgData name="James Dyer" userId="c78f284b-7e37-4191-b5a6-8e3806eb7037" providerId="ADAL" clId="{D5252268-0D0F-4541-8ACA-BDEDFCAB75FD}" dt="2025-09-01T13:31:40.322" v="0" actId="47"/>
+        <pc:sldMkLst>
+          <pc:docMk/>
+          <pc:sldMk cId="2245304506" sldId="274"/>
+        </pc:sldMkLst>
+      </pc:sldChg>
+      <pc:sldChg chg="del">
+        <pc:chgData name="James Dyer" userId="c78f284b-7e37-4191-b5a6-8e3806eb7037" providerId="ADAL" clId="{D5252268-0D0F-4541-8ACA-BDEDFCAB75FD}" dt="2025-09-01T13:31:52.042" v="1" actId="47"/>
+        <pc:sldMkLst>
+          <pc:docMk/>
+          <pc:sldMk cId="3741139823" sldId="286"/>
+        </pc:sldMkLst>
+      </pc:sldChg>
+      <pc:sldChg chg="del">
+        <pc:chgData name="James Dyer" userId="c78f284b-7e37-4191-b5a6-8e3806eb7037" providerId="ADAL" clId="{D5252268-0D0F-4541-8ACA-BDEDFCAB75FD}" dt="2025-09-01T13:31:52.042" v="1" actId="47"/>
+        <pc:sldMkLst>
+          <pc:docMk/>
+          <pc:sldMk cId="2559613080" sldId="287"/>
+        </pc:sldMkLst>
+      </pc:sldChg>
+      <pc:sldChg chg="del">
+        <pc:chgData name="James Dyer" userId="c78f284b-7e37-4191-b5a6-8e3806eb7037" providerId="ADAL" clId="{D5252268-0D0F-4541-8ACA-BDEDFCAB75FD}" dt="2025-09-01T13:32:02.134" v="2" actId="47"/>
+        <pc:sldMkLst>
+          <pc:docMk/>
+          <pc:sldMk cId="754725535" sldId="293"/>
+        </pc:sldMkLst>
+      </pc:sldChg>
+      <pc:sldChg chg="del">
+        <pc:chgData name="James Dyer" userId="c78f284b-7e37-4191-b5a6-8e3806eb7037" providerId="ADAL" clId="{D5252268-0D0F-4541-8ACA-BDEDFCAB75FD}" dt="2025-09-01T13:32:02.134" v="2" actId="47"/>
+        <pc:sldMkLst>
+          <pc:docMk/>
+          <pc:sldMk cId="4267135962" sldId="294"/>
+        </pc:sldMkLst>
+      </pc:sldChg>
+      <pc:sldChg chg="del">
+        <pc:chgData name="James Dyer" userId="c78f284b-7e37-4191-b5a6-8e3806eb7037" providerId="ADAL" clId="{D5252268-0D0F-4541-8ACA-BDEDFCAB75FD}" dt="2025-09-01T13:32:13.907" v="3" actId="47"/>
+        <pc:sldMkLst>
+          <pc:docMk/>
+          <pc:sldMk cId="4058427115" sldId="298"/>
+        </pc:sldMkLst>
+      </pc:sldChg>
+      <pc:sldChg chg="del">
+        <pc:chgData name="James Dyer" userId="c78f284b-7e37-4191-b5a6-8e3806eb7037" providerId="ADAL" clId="{D5252268-0D0F-4541-8ACA-BDEDFCAB75FD}" dt="2025-09-01T13:32:13.907" v="3" actId="47"/>
+        <pc:sldMkLst>
+          <pc:docMk/>
+          <pc:sldMk cId="2798715774" sldId="352"/>
+        </pc:sldMkLst>
+      </pc:sldChg>
+    </pc:docChg>
+  </pc:docChgLst>
+  <pc:docChgLst>
     <pc:chgData name="James Dyer" userId="c78f284b-7e37-4191-b5a6-8e3806eb7037" providerId="ADAL" clId="{04AE66E2-286C-4FC9-85D4-E45DF9D4283F}"/>
     <pc:docChg chg="modSld">
       <pc:chgData name="James Dyer" userId="c78f284b-7e37-4191-b5a6-8e3806eb7037" providerId="ADAL" clId="{04AE66E2-286C-4FC9-85D4-E45DF9D4283F}" dt="2025-06-26T15:16:13.952" v="232" actId="20577"/>
@@ -809,6 +699,139 @@
         <pc:sldMkLst>
           <pc:docMk/>
           <pc:sldMk cId="2075922209" sldId="277"/>
+        </pc:sldMkLst>
+      </pc:sldChg>
+    </pc:docChg>
+  </pc:docChgLst>
+  <pc:docChgLst>
+    <pc:chgData name="James Dyer" userId="c78f284b-7e37-4191-b5a6-8e3806eb7037" providerId="ADAL" clId="{165CD995-CA79-480E-BE60-894280E89E12}"/>
+    <pc:docChg chg="modSld">
+      <pc:chgData name="James Dyer" userId="c78f284b-7e37-4191-b5a6-8e3806eb7037" providerId="ADAL" clId="{165CD995-CA79-480E-BE60-894280E89E12}" dt="2024-12-09T14:58:05.899" v="62" actId="14734"/>
+      <pc:docMkLst>
+        <pc:docMk/>
+      </pc:docMkLst>
+      <pc:sldChg chg="modSp mod">
+        <pc:chgData name="James Dyer" userId="c78f284b-7e37-4191-b5a6-8e3806eb7037" providerId="ADAL" clId="{165CD995-CA79-480E-BE60-894280E89E12}" dt="2024-12-09T14:58:05.899" v="62" actId="14734"/>
+        <pc:sldMkLst>
+          <pc:docMk/>
+          <pc:sldMk cId="1834755248" sldId="275"/>
+        </pc:sldMkLst>
+      </pc:sldChg>
+    </pc:docChg>
+  </pc:docChgLst>
+  <pc:docChgLst>
+    <pc:chgData name="James Dyer" userId="c78f284b-7e37-4191-b5a6-8e3806eb7037" providerId="ADAL" clId="{2DE821A4-F2FB-46B5-9495-83D9A2E5DF87}"/>
+    <pc:docChg chg="modSld">
+      <pc:chgData name="James Dyer" userId="c78f284b-7e37-4191-b5a6-8e3806eb7037" providerId="ADAL" clId="{2DE821A4-F2FB-46B5-9495-83D9A2E5DF87}" dt="2025-10-16T12:21:34.803" v="7" actId="20577"/>
+      <pc:docMkLst>
+        <pc:docMk/>
+      </pc:docMkLst>
+      <pc:sldChg chg="modSp">
+        <pc:chgData name="James Dyer" userId="c78f284b-7e37-4191-b5a6-8e3806eb7037" providerId="ADAL" clId="{2DE821A4-F2FB-46B5-9495-83D9A2E5DF87}" dt="2025-10-16T12:21:34.803" v="7" actId="20577"/>
+        <pc:sldMkLst>
+          <pc:docMk/>
+          <pc:sldMk cId="3803454951" sldId="272"/>
+        </pc:sldMkLst>
+        <pc:spChg chg="mod">
+          <ac:chgData name="James Dyer" userId="c78f284b-7e37-4191-b5a6-8e3806eb7037" providerId="ADAL" clId="{2DE821A4-F2FB-46B5-9495-83D9A2E5DF87}" dt="2025-10-16T12:21:34.803" v="7" actId="20577"/>
+          <ac:spMkLst>
+            <pc:docMk/>
+            <pc:sldMk cId="3803454951" sldId="272"/>
+            <ac:spMk id="3" creationId="{E048A38D-B5AC-168B-4EC6-93C404289CF3}"/>
+          </ac:spMkLst>
+        </pc:spChg>
+      </pc:sldChg>
+    </pc:docChg>
+  </pc:docChgLst>
+  <pc:docChgLst>
+    <pc:chgData name="James Dyer" userId="c78f284b-7e37-4191-b5a6-8e3806eb7037" providerId="ADAL" clId="{D985001E-EA5F-4E37-AD7D-B1A64860480F}"/>
+    <pc:docChg chg="addSld delSld modSld">
+      <pc:chgData name="James Dyer" userId="c78f284b-7e37-4191-b5a6-8e3806eb7037" providerId="ADAL" clId="{D985001E-EA5F-4E37-AD7D-B1A64860480F}" dt="2025-03-11T14:54:31.348" v="342" actId="20577"/>
+      <pc:docMkLst>
+        <pc:docMk/>
+      </pc:docMkLst>
+      <pc:sldChg chg="modSp">
+        <pc:chgData name="James Dyer" userId="c78f284b-7e37-4191-b5a6-8e3806eb7037" providerId="ADAL" clId="{D985001E-EA5F-4E37-AD7D-B1A64860480F}" dt="2025-03-11T14:49:24.868" v="33" actId="20577"/>
+        <pc:sldMkLst>
+          <pc:docMk/>
+          <pc:sldMk cId="5741423" sldId="264"/>
+        </pc:sldMkLst>
+      </pc:sldChg>
+      <pc:sldChg chg="modSp">
+        <pc:chgData name="James Dyer" userId="c78f284b-7e37-4191-b5a6-8e3806eb7037" providerId="ADAL" clId="{D985001E-EA5F-4E37-AD7D-B1A64860480F}" dt="2025-03-11T14:49:16.660" v="28" actId="20577"/>
+        <pc:sldMkLst>
+          <pc:docMk/>
+          <pc:sldMk cId="1256353005" sldId="268"/>
+        </pc:sldMkLst>
+      </pc:sldChg>
+      <pc:sldChg chg="modSp">
+        <pc:chgData name="James Dyer" userId="c78f284b-7e37-4191-b5a6-8e3806eb7037" providerId="ADAL" clId="{D985001E-EA5F-4E37-AD7D-B1A64860480F}" dt="2025-03-11T14:49:07.660" v="15" actId="20577"/>
+        <pc:sldMkLst>
+          <pc:docMk/>
+          <pc:sldMk cId="3674065384" sldId="269"/>
+        </pc:sldMkLst>
+      </pc:sldChg>
+      <pc:sldChg chg="modSp">
+        <pc:chgData name="James Dyer" userId="c78f284b-7e37-4191-b5a6-8e3806eb7037" providerId="ADAL" clId="{D985001E-EA5F-4E37-AD7D-B1A64860480F}" dt="2025-03-11T14:48:56.117" v="4" actId="20577"/>
+        <pc:sldMkLst>
+          <pc:docMk/>
+          <pc:sldMk cId="625189356" sldId="271"/>
+        </pc:sldMkLst>
+      </pc:sldChg>
+      <pc:sldChg chg="del">
+        <pc:chgData name="James Dyer" userId="c78f284b-7e37-4191-b5a6-8e3806eb7037" providerId="ADAL" clId="{D985001E-EA5F-4E37-AD7D-B1A64860480F}" dt="2025-03-11T14:51:54.235" v="171" actId="2696"/>
+        <pc:sldMkLst>
+          <pc:docMk/>
+          <pc:sldMk cId="880848308" sldId="281"/>
+        </pc:sldMkLst>
+      </pc:sldChg>
+      <pc:sldChg chg="del">
+        <pc:chgData name="James Dyer" userId="c78f284b-7e37-4191-b5a6-8e3806eb7037" providerId="ADAL" clId="{D985001E-EA5F-4E37-AD7D-B1A64860480F}" dt="2025-03-11T14:51:47.842" v="170" actId="2696"/>
+        <pc:sldMkLst>
+          <pc:docMk/>
+          <pc:sldMk cId="379466069" sldId="283"/>
+        </pc:sldMkLst>
+      </pc:sldChg>
+      <pc:sldChg chg="del">
+        <pc:chgData name="James Dyer" userId="c78f284b-7e37-4191-b5a6-8e3806eb7037" providerId="ADAL" clId="{D985001E-EA5F-4E37-AD7D-B1A64860480F}" dt="2025-03-11T14:52:13.531" v="172" actId="2696"/>
+        <pc:sldMkLst>
+          <pc:docMk/>
+          <pc:sldMk cId="139244500" sldId="289"/>
+        </pc:sldMkLst>
+      </pc:sldChg>
+      <pc:sldChg chg="modSp mod">
+        <pc:chgData name="James Dyer" userId="c78f284b-7e37-4191-b5a6-8e3806eb7037" providerId="ADAL" clId="{D985001E-EA5F-4E37-AD7D-B1A64860480F}" dt="2025-03-11T14:54:31.348" v="342" actId="20577"/>
+        <pc:sldMkLst>
+          <pc:docMk/>
+          <pc:sldMk cId="2837838066" sldId="308"/>
+        </pc:sldMkLst>
+      </pc:sldChg>
+      <pc:sldChg chg="modSp new mod">
+        <pc:chgData name="James Dyer" userId="c78f284b-7e37-4191-b5a6-8e3806eb7037" providerId="ADAL" clId="{D985001E-EA5F-4E37-AD7D-B1A64860480F}" dt="2025-03-11T14:50:17.415" v="86" actId="20577"/>
+        <pc:sldMkLst>
+          <pc:docMk/>
+          <pc:sldMk cId="1746381905" sldId="340"/>
+        </pc:sldMkLst>
+      </pc:sldChg>
+      <pc:sldChg chg="modSp new mod">
+        <pc:chgData name="James Dyer" userId="c78f284b-7e37-4191-b5a6-8e3806eb7037" providerId="ADAL" clId="{D985001E-EA5F-4E37-AD7D-B1A64860480F}" dt="2025-03-11T14:50:59.838" v="168" actId="20577"/>
+        <pc:sldMkLst>
+          <pc:docMk/>
+          <pc:sldMk cId="3037604075" sldId="341"/>
+        </pc:sldMkLst>
+      </pc:sldChg>
+      <pc:sldChg chg="modSp new mod">
+        <pc:chgData name="James Dyer" userId="c78f284b-7e37-4191-b5a6-8e3806eb7037" providerId="ADAL" clId="{D985001E-EA5F-4E37-AD7D-B1A64860480F}" dt="2025-03-11T14:53:41.088" v="332" actId="20577"/>
+        <pc:sldMkLst>
+          <pc:docMk/>
+          <pc:sldMk cId="721780042" sldId="342"/>
+        </pc:sldMkLst>
+      </pc:sldChg>
+      <pc:sldChg chg="add del">
+        <pc:chgData name="James Dyer" userId="c78f284b-7e37-4191-b5a6-8e3806eb7037" providerId="ADAL" clId="{D985001E-EA5F-4E37-AD7D-B1A64860480F}" dt="2025-03-11T14:51:47.842" v="170" actId="2696"/>
+        <pc:sldMkLst>
+          <pc:docMk/>
+          <pc:sldMk cId="1288733903" sldId="342"/>
         </pc:sldMkLst>
       </pc:sldChg>
     </pc:docChg>
@@ -1096,29 +1119,6 @@
     </pc:docChg>
   </pc:docChgLst>
   <pc:docChgLst>
-    <pc:chgData name="James Dyer" userId="c78f284b-7e37-4191-b5a6-8e3806eb7037" providerId="ADAL" clId="{9136AB9D-76A3-4571-A450-C56184ECEB32}"/>
-    <pc:docChg chg="modSld">
-      <pc:chgData name="James Dyer" userId="c78f284b-7e37-4191-b5a6-8e3806eb7037" providerId="ADAL" clId="{9136AB9D-76A3-4571-A450-C56184ECEB32}" dt="2025-04-11T11:12:50.545" v="57" actId="20577"/>
-      <pc:docMkLst>
-        <pc:docMk/>
-      </pc:docMkLst>
-      <pc:sldChg chg="modSp">
-        <pc:chgData name="James Dyer" userId="c78f284b-7e37-4191-b5a6-8e3806eb7037" providerId="ADAL" clId="{9136AB9D-76A3-4571-A450-C56184ECEB32}" dt="2025-04-11T11:10:35.387" v="41" actId="113"/>
-        <pc:sldMkLst>
-          <pc:docMk/>
-          <pc:sldMk cId="3674065384" sldId="269"/>
-        </pc:sldMkLst>
-      </pc:sldChg>
-      <pc:sldChg chg="modSp mod">
-        <pc:chgData name="James Dyer" userId="c78f284b-7e37-4191-b5a6-8e3806eb7037" providerId="ADAL" clId="{9136AB9D-76A3-4571-A450-C56184ECEB32}" dt="2025-04-11T11:12:50.545" v="57" actId="20577"/>
-        <pc:sldMkLst>
-          <pc:docMk/>
-          <pc:sldMk cId="1834755248" sldId="275"/>
-        </pc:sldMkLst>
-      </pc:sldChg>
-    </pc:docChg>
-  </pc:docChgLst>
-  <pc:docChgLst>
     <pc:chgData name="James Dyer" userId="c78f284b-7e37-4191-b5a6-8e3806eb7037" providerId="ADAL" clId="{DBBF8EB1-EBFB-4A39-B2FB-FAB48817205C}"/>
     <pc:docChg chg="custSel modSld">
       <pc:chgData name="James Dyer" userId="c78f284b-7e37-4191-b5a6-8e3806eb7037" providerId="ADAL" clId="{DBBF8EB1-EBFB-4A39-B2FB-FAB48817205C}" dt="2024-10-14T15:58:10.351" v="45" actId="27636"/>
@@ -1219,7 +1219,7 @@
           <a:p>
             <a:fld id="{675F54FA-5161-4B7D-8E72-34D5EE3663CF}" type="datetimeFigureOut">
               <a:rPr lang="en-GB" smtClean="0"/>
-              <a:t>16/10/2025</a:t>
+              <a:t>12/10/2026</a:t>
             </a:fld>
             <a:endParaRPr lang="en-GB"/>
           </a:p>
@@ -2224,7 +2224,7 @@
           <a:p>
             <a:fld id="{89C08CDB-1F5C-45D4-A4FF-A54AE1B03142}" type="datetimeFigureOut">
               <a:rPr lang="en-GB" smtClean="0"/>
-              <a:t>16/10/2025</a:t>
+              <a:t>12/10/2026</a:t>
             </a:fld>
             <a:endParaRPr lang="en-GB"/>
           </a:p>
@@ -2424,7 +2424,7 @@
           <a:p>
             <a:fld id="{89C08CDB-1F5C-45D4-A4FF-A54AE1B03142}" type="datetimeFigureOut">
               <a:rPr lang="en-GB" smtClean="0"/>
-              <a:t>16/10/2025</a:t>
+              <a:t>12/10/2026</a:t>
             </a:fld>
             <a:endParaRPr lang="en-GB"/>
           </a:p>
@@ -2634,7 +2634,7 @@
           <a:p>
             <a:fld id="{89C08CDB-1F5C-45D4-A4FF-A54AE1B03142}" type="datetimeFigureOut">
               <a:rPr lang="en-GB" smtClean="0"/>
-              <a:t>16/10/2025</a:t>
+              <a:t>12/10/2026</a:t>
             </a:fld>
             <a:endParaRPr lang="en-GB"/>
           </a:p>
@@ -2834,7 +2834,7 @@
           <a:p>
             <a:fld id="{89C08CDB-1F5C-45D4-A4FF-A54AE1B03142}" type="datetimeFigureOut">
               <a:rPr lang="en-GB" smtClean="0"/>
-              <a:t>16/10/2025</a:t>
+              <a:t>12/10/2026</a:t>
             </a:fld>
             <a:endParaRPr lang="en-GB"/>
           </a:p>
@@ -3110,7 +3110,7 @@
           <a:p>
             <a:fld id="{89C08CDB-1F5C-45D4-A4FF-A54AE1B03142}" type="datetimeFigureOut">
               <a:rPr lang="en-GB" smtClean="0"/>
-              <a:t>16/10/2025</a:t>
+              <a:t>12/10/2026</a:t>
             </a:fld>
             <a:endParaRPr lang="en-GB"/>
           </a:p>
@@ -3378,7 +3378,7 @@
           <a:p>
             <a:fld id="{89C08CDB-1F5C-45D4-A4FF-A54AE1B03142}" type="datetimeFigureOut">
               <a:rPr lang="en-GB" smtClean="0"/>
-              <a:t>16/10/2025</a:t>
+              <a:t>12/10/2026</a:t>
             </a:fld>
             <a:endParaRPr lang="en-GB"/>
           </a:p>
@@ -3793,7 +3793,7 @@
           <a:p>
             <a:fld id="{89C08CDB-1F5C-45D4-A4FF-A54AE1B03142}" type="datetimeFigureOut">
               <a:rPr lang="en-GB" smtClean="0"/>
-              <a:t>16/10/2025</a:t>
+              <a:t>12/10/2026</a:t>
             </a:fld>
             <a:endParaRPr lang="en-GB"/>
           </a:p>
@@ -3935,7 +3935,7 @@
           <a:p>
             <a:fld id="{89C08CDB-1F5C-45D4-A4FF-A54AE1B03142}" type="datetimeFigureOut">
               <a:rPr lang="en-GB" smtClean="0"/>
-              <a:t>16/10/2025</a:t>
+              <a:t>12/10/2026</a:t>
             </a:fld>
             <a:endParaRPr lang="en-GB"/>
           </a:p>
@@ -4048,7 +4048,7 @@
           <a:p>
             <a:fld id="{89C08CDB-1F5C-45D4-A4FF-A54AE1B03142}" type="datetimeFigureOut">
               <a:rPr lang="en-GB" smtClean="0"/>
-              <a:t>16/10/2025</a:t>
+              <a:t>12/10/2026</a:t>
             </a:fld>
             <a:endParaRPr lang="en-GB"/>
           </a:p>
@@ -4361,7 +4361,7 @@
           <a:p>
             <a:fld id="{89C08CDB-1F5C-45D4-A4FF-A54AE1B03142}" type="datetimeFigureOut">
               <a:rPr lang="en-GB" smtClean="0"/>
-              <a:t>16/10/2025</a:t>
+              <a:t>12/10/2026</a:t>
             </a:fld>
             <a:endParaRPr lang="en-GB"/>
           </a:p>
@@ -4650,7 +4650,7 @@
           <a:p>
             <a:fld id="{89C08CDB-1F5C-45D4-A4FF-A54AE1B03142}" type="datetimeFigureOut">
               <a:rPr lang="en-GB" smtClean="0"/>
-              <a:t>16/10/2025</a:t>
+              <a:t>12/10/2026</a:t>
             </a:fld>
             <a:endParaRPr lang="en-GB"/>
           </a:p>
@@ -4893,7 +4893,7 @@
           <a:p>
             <a:fld id="{89C08CDB-1F5C-45D4-A4FF-A54AE1B03142}" type="datetimeFigureOut">
               <a:rPr lang="en-GB" smtClean="0"/>
-              <a:t>16/10/2025</a:t>
+              <a:t>12/10/2026</a:t>
             </a:fld>
             <a:endParaRPr lang="en-GB"/>
           </a:p>
@@ -19167,8 +19167,8 @@
           </a:p>
         </p:txBody>
       </p:sp>
-      <mc:AlternateContent xmlns:mc="http://schemas.openxmlformats.org/markup-compatibility/2006">
-        <mc:Choice xmlns:a14="http://schemas.microsoft.com/office/drawing/2010/main" Requires="a14">
+      <mc:AlternateContent xmlns:mc="http://schemas.openxmlformats.org/markup-compatibility/2006" xmlns:a14="http://schemas.microsoft.com/office/drawing/2010/main">
+        <mc:Choice Requires="a14">
           <p:sp>
             <p:nvSpPr>
               <p:cNvPr id="3" name="Content Placeholder 2">
@@ -19237,14 +19237,7 @@
                         <a:latin typeface="Cambria Math" panose="02040503050406030204" pitchFamily="18" charset="0"/>
                         <a:ea typeface="Cambria Math" panose="02040503050406030204" pitchFamily="18" charset="0"/>
                       </a:rPr>
-                      <m:t>)</m:t>
-                    </m:r>
-                    <m:r>
-                      <a:rPr lang="en-GB" b="0" i="1" dirty="0" smtClean="0">
-                        <a:latin typeface="Cambria Math" panose="02040503050406030204" pitchFamily="18" charset="0"/>
-                        <a:ea typeface="Cambria Math" panose="02040503050406030204" pitchFamily="18" charset="0"/>
-                      </a:rPr>
-                      <m:t>∨</m:t>
+                      <m:t>)∨</m:t>
                     </m:r>
                     <m:r>
                       <a:rPr lang="en-GB" b="0" i="1" dirty="0" smtClean="0">
@@ -19539,7 +19532,7 @@
             </p:txBody>
           </p:sp>
         </mc:Choice>
-        <mc:Fallback>
+        <mc:Fallback xmlns="">
           <p:sp>
             <p:nvSpPr>
               <p:cNvPr id="3" name="Content Placeholder 2">
